--- a/public/fun/pack/pptx/birthday/돌잔치_13_사진중심_오월숲길.pptx
+++ b/public/fun/pack/pptx/birthday/돌잔치_13_사진중심_오월숲길.pptx
@@ -3347,7 +3347,7 @@
             <a:r>
               <a:rPr sz="4000" b="1" i="0">
                 <a:solidFill>
-                  <a:srgbClr val="143D21"/>
+                  <a:srgbClr val="1D7236"/>
                 </a:solidFill>
               </a:rPr>
               <a:t>첫 번째 생일</a:t>
@@ -3385,7 +3385,7 @@
             <a:r>
               <a:rPr sz="1700" b="0" i="1">
                 <a:solidFill>
-                  <a:srgbClr val="143D21"/>
+                  <a:srgbClr val="1D7236"/>
                 </a:solidFill>
               </a:rPr>
               <a:t>사진첩 한 권이 벌써 가득 찼습니다</a:t>
@@ -3460,7 +3460,7 @@
     <p:bg>
       <p:bgPr>
         <a:solidFill>
-          <a:srgbClr val="D0F1DA"/>
+          <a:srgbClr val="D4F7DE"/>
         </a:solidFill>
         <a:effectLst/>
       </p:bgPr>
@@ -3491,7 +3491,7 @@
           </a:solidFill>
           <a:ln w="25400">
             <a:solidFill>
-              <a:srgbClr val="2B8245"/>
+              <a:srgbClr val="43D66F"/>
             </a:solidFill>
             <a:prstDash val="dash"/>
           </a:ln>
@@ -3534,7 +3534,7 @@
             <a:r>
               <a:rPr sz="3000" b="1" i="0">
                 <a:solidFill>
-                  <a:srgbClr val="143D21"/>
+                  <a:srgbClr val="1D7236"/>
                 </a:solidFill>
               </a:rPr>
               <a:t>우리 아기를 소개합니다</a:t>
@@ -3559,11 +3559,11 @@
             </a:avLst>
           </a:prstGeom>
           <a:solidFill>
-            <a:srgbClr val="D0F1DA"/>
+            <a:srgbClr val="D4F7DE"/>
           </a:solidFill>
           <a:ln w="19050">
             <a:solidFill>
-              <a:srgbClr val="2B8245"/>
+              <a:srgbClr val="43D66F"/>
             </a:solidFill>
             <a:prstDash val="dash"/>
           </a:ln>
@@ -3582,7 +3582,7 @@
             <a:r>
               <a:rPr sz="1400" b="0" i="0">
                 <a:solidFill>
-                  <a:srgbClr val="143D21"/>
+                  <a:srgbClr val="1D7236"/>
                 </a:solidFill>
               </a:rPr>
               <a:t>아기 사진을 넣어 주세요</a:t>
@@ -3622,7 +3622,7 @@
                       <a:r>
                         <a:rPr sz="1500" b="1">
                           <a:solidFill>
-                            <a:srgbClr val="143D21"/>
+                            <a:srgbClr val="1D7236"/>
                           </a:solidFill>
                         </a:rPr>
                         <a:t>이름</a:t>
@@ -3632,30 +3632,30 @@
                   <a:tcPr anchor="ctr" marL="73152" marR="73152">
                     <a:lnL w="9525" cap="flat" cmpd="sng" algn="ctr">
                       <a:solidFill>
-                        <a:srgbClr val="D0F1DA"/>
+                        <a:srgbClr val="D4F7DE"/>
                       </a:solidFill>
                       <a:prstDash val="solid"/>
                     </a:lnL>
                     <a:lnR w="9525" cap="flat" cmpd="sng" algn="ctr">
                       <a:solidFill>
-                        <a:srgbClr val="D0F1DA"/>
+                        <a:srgbClr val="D4F7DE"/>
                       </a:solidFill>
                       <a:prstDash val="solid"/>
                     </a:lnR>
                     <a:lnT w="9525" cap="flat" cmpd="sng" algn="ctr">
                       <a:solidFill>
-                        <a:srgbClr val="D0F1DA"/>
+                        <a:srgbClr val="D4F7DE"/>
                       </a:solidFill>
                       <a:prstDash val="solid"/>
                     </a:lnT>
                     <a:lnB w="9525" cap="flat" cmpd="sng" algn="ctr">
                       <a:solidFill>
-                        <a:srgbClr val="D0F1DA"/>
+                        <a:srgbClr val="D4F7DE"/>
                       </a:solidFill>
                       <a:prstDash val="solid"/>
                     </a:lnB>
                     <a:solidFill>
-                      <a:srgbClr val="D0F1DA"/>
+                      <a:srgbClr val="D4F7DE"/>
                     </a:solidFill>
                   </a:tcPr>
                 </a:tc>
@@ -3678,30 +3678,30 @@
                   <a:tcPr anchor="ctr" marL="73152" marR="73152">
                     <a:lnL w="9525" cap="flat" cmpd="sng" algn="ctr">
                       <a:solidFill>
-                        <a:srgbClr val="D0F1DA"/>
+                        <a:srgbClr val="D4F7DE"/>
                       </a:solidFill>
                       <a:prstDash val="solid"/>
                     </a:lnL>
                     <a:lnR w="9525" cap="flat" cmpd="sng" algn="ctr">
                       <a:solidFill>
-                        <a:srgbClr val="D0F1DA"/>
+                        <a:srgbClr val="D4F7DE"/>
                       </a:solidFill>
                       <a:prstDash val="solid"/>
                     </a:lnR>
                     <a:lnT w="9525" cap="flat" cmpd="sng" algn="ctr">
                       <a:solidFill>
-                        <a:srgbClr val="D0F1DA"/>
+                        <a:srgbClr val="D4F7DE"/>
                       </a:solidFill>
                       <a:prstDash val="solid"/>
                     </a:lnT>
                     <a:lnB w="9525" cap="flat" cmpd="sng" algn="ctr">
                       <a:solidFill>
-                        <a:srgbClr val="D0F1DA"/>
+                        <a:srgbClr val="D4F7DE"/>
                       </a:solidFill>
                       <a:prstDash val="solid"/>
                     </a:lnB>
                     <a:solidFill>
-                      <a:srgbClr val="F0FAF3"/>
+                      <a:srgbClr val="F3FCF6"/>
                     </a:solidFill>
                   </a:tcPr>
                 </a:tc>
@@ -3716,7 +3716,7 @@
                       <a:r>
                         <a:rPr sz="1500" b="1">
                           <a:solidFill>
-                            <a:srgbClr val="143D21"/>
+                            <a:srgbClr val="1D7236"/>
                           </a:solidFill>
                         </a:rPr>
                         <a:t>생일</a:t>
@@ -3726,30 +3726,30 @@
                   <a:tcPr anchor="ctr" marL="73152" marR="73152">
                     <a:lnL w="9525" cap="flat" cmpd="sng" algn="ctr">
                       <a:solidFill>
-                        <a:srgbClr val="D0F1DA"/>
+                        <a:srgbClr val="D4F7DE"/>
                       </a:solidFill>
                       <a:prstDash val="solid"/>
                     </a:lnL>
                     <a:lnR w="9525" cap="flat" cmpd="sng" algn="ctr">
                       <a:solidFill>
-                        <a:srgbClr val="D0F1DA"/>
+                        <a:srgbClr val="D4F7DE"/>
                       </a:solidFill>
                       <a:prstDash val="solid"/>
                     </a:lnR>
                     <a:lnT w="9525" cap="flat" cmpd="sng" algn="ctr">
                       <a:solidFill>
-                        <a:srgbClr val="D0F1DA"/>
+                        <a:srgbClr val="D4F7DE"/>
                       </a:solidFill>
                       <a:prstDash val="solid"/>
                     </a:lnT>
                     <a:lnB w="9525" cap="flat" cmpd="sng" algn="ctr">
                       <a:solidFill>
-                        <a:srgbClr val="D0F1DA"/>
+                        <a:srgbClr val="D4F7DE"/>
                       </a:solidFill>
                       <a:prstDash val="solid"/>
                     </a:lnB>
                     <a:solidFill>
-                      <a:srgbClr val="D0F1DA"/>
+                      <a:srgbClr val="D4F7DE"/>
                     </a:solidFill>
                   </a:tcPr>
                 </a:tc>
@@ -3772,25 +3772,25 @@
                   <a:tcPr anchor="ctr" marL="73152" marR="73152">
                     <a:lnL w="9525" cap="flat" cmpd="sng" algn="ctr">
                       <a:solidFill>
-                        <a:srgbClr val="D0F1DA"/>
+                        <a:srgbClr val="D4F7DE"/>
                       </a:solidFill>
                       <a:prstDash val="solid"/>
                     </a:lnL>
                     <a:lnR w="9525" cap="flat" cmpd="sng" algn="ctr">
                       <a:solidFill>
-                        <a:srgbClr val="D0F1DA"/>
+                        <a:srgbClr val="D4F7DE"/>
                       </a:solidFill>
                       <a:prstDash val="solid"/>
                     </a:lnR>
                     <a:lnT w="9525" cap="flat" cmpd="sng" algn="ctr">
                       <a:solidFill>
-                        <a:srgbClr val="D0F1DA"/>
+                        <a:srgbClr val="D4F7DE"/>
                       </a:solidFill>
                       <a:prstDash val="solid"/>
                     </a:lnT>
                     <a:lnB w="9525" cap="flat" cmpd="sng" algn="ctr">
                       <a:solidFill>
-                        <a:srgbClr val="D0F1DA"/>
+                        <a:srgbClr val="D4F7DE"/>
                       </a:solidFill>
                       <a:prstDash val="solid"/>
                     </a:lnB>
@@ -3810,7 +3810,7 @@
                       <a:r>
                         <a:rPr sz="1500" b="1">
                           <a:solidFill>
-                            <a:srgbClr val="143D21"/>
+                            <a:srgbClr val="1D7236"/>
                           </a:solidFill>
                         </a:rPr>
                         <a:t>키 · 몸무게</a:t>
@@ -3820,30 +3820,30 @@
                   <a:tcPr anchor="ctr" marL="73152" marR="73152">
                     <a:lnL w="9525" cap="flat" cmpd="sng" algn="ctr">
                       <a:solidFill>
-                        <a:srgbClr val="D0F1DA"/>
+                        <a:srgbClr val="D4F7DE"/>
                       </a:solidFill>
                       <a:prstDash val="solid"/>
                     </a:lnL>
                     <a:lnR w="9525" cap="flat" cmpd="sng" algn="ctr">
                       <a:solidFill>
-                        <a:srgbClr val="D0F1DA"/>
+                        <a:srgbClr val="D4F7DE"/>
                       </a:solidFill>
                       <a:prstDash val="solid"/>
                     </a:lnR>
                     <a:lnT w="9525" cap="flat" cmpd="sng" algn="ctr">
                       <a:solidFill>
-                        <a:srgbClr val="D0F1DA"/>
+                        <a:srgbClr val="D4F7DE"/>
                       </a:solidFill>
                       <a:prstDash val="solid"/>
                     </a:lnT>
                     <a:lnB w="9525" cap="flat" cmpd="sng" algn="ctr">
                       <a:solidFill>
-                        <a:srgbClr val="D0F1DA"/>
+                        <a:srgbClr val="D4F7DE"/>
                       </a:solidFill>
                       <a:prstDash val="solid"/>
                     </a:lnB>
                     <a:solidFill>
-                      <a:srgbClr val="D0F1DA"/>
+                      <a:srgbClr val="D4F7DE"/>
                     </a:solidFill>
                   </a:tcPr>
                 </a:tc>
@@ -3866,30 +3866,30 @@
                   <a:tcPr anchor="ctr" marL="73152" marR="73152">
                     <a:lnL w="9525" cap="flat" cmpd="sng" algn="ctr">
                       <a:solidFill>
-                        <a:srgbClr val="D0F1DA"/>
+                        <a:srgbClr val="D4F7DE"/>
                       </a:solidFill>
                       <a:prstDash val="solid"/>
                     </a:lnL>
                     <a:lnR w="9525" cap="flat" cmpd="sng" algn="ctr">
                       <a:solidFill>
-                        <a:srgbClr val="D0F1DA"/>
+                        <a:srgbClr val="D4F7DE"/>
                       </a:solidFill>
                       <a:prstDash val="solid"/>
                     </a:lnR>
                     <a:lnT w="9525" cap="flat" cmpd="sng" algn="ctr">
                       <a:solidFill>
-                        <a:srgbClr val="D0F1DA"/>
+                        <a:srgbClr val="D4F7DE"/>
                       </a:solidFill>
                       <a:prstDash val="solid"/>
                     </a:lnT>
                     <a:lnB w="9525" cap="flat" cmpd="sng" algn="ctr">
                       <a:solidFill>
-                        <a:srgbClr val="D0F1DA"/>
+                        <a:srgbClr val="D4F7DE"/>
                       </a:solidFill>
                       <a:prstDash val="solid"/>
                     </a:lnB>
                     <a:solidFill>
-                      <a:srgbClr val="F0FAF3"/>
+                      <a:srgbClr val="F3FCF6"/>
                     </a:solidFill>
                   </a:tcPr>
                 </a:tc>
@@ -3904,7 +3904,7 @@
                       <a:r>
                         <a:rPr sz="1500" b="1">
                           <a:solidFill>
-                            <a:srgbClr val="143D21"/>
+                            <a:srgbClr val="1D7236"/>
                           </a:solidFill>
                         </a:rPr>
                         <a:t>좋아하는 것</a:t>
@@ -3914,30 +3914,30 @@
                   <a:tcPr anchor="ctr" marL="73152" marR="73152">
                     <a:lnL w="9525" cap="flat" cmpd="sng" algn="ctr">
                       <a:solidFill>
-                        <a:srgbClr val="D0F1DA"/>
+                        <a:srgbClr val="D4F7DE"/>
                       </a:solidFill>
                       <a:prstDash val="solid"/>
                     </a:lnL>
                     <a:lnR w="9525" cap="flat" cmpd="sng" algn="ctr">
                       <a:solidFill>
-                        <a:srgbClr val="D0F1DA"/>
+                        <a:srgbClr val="D4F7DE"/>
                       </a:solidFill>
                       <a:prstDash val="solid"/>
                     </a:lnR>
                     <a:lnT w="9525" cap="flat" cmpd="sng" algn="ctr">
                       <a:solidFill>
-                        <a:srgbClr val="D0F1DA"/>
+                        <a:srgbClr val="D4F7DE"/>
                       </a:solidFill>
                       <a:prstDash val="solid"/>
                     </a:lnT>
                     <a:lnB w="9525" cap="flat" cmpd="sng" algn="ctr">
                       <a:solidFill>
-                        <a:srgbClr val="D0F1DA"/>
+                        <a:srgbClr val="D4F7DE"/>
                       </a:solidFill>
                       <a:prstDash val="solid"/>
                     </a:lnB>
                     <a:solidFill>
-                      <a:srgbClr val="D0F1DA"/>
+                      <a:srgbClr val="D4F7DE"/>
                     </a:solidFill>
                   </a:tcPr>
                 </a:tc>
@@ -3960,25 +3960,25 @@
                   <a:tcPr anchor="ctr" marL="73152" marR="73152">
                     <a:lnL w="9525" cap="flat" cmpd="sng" algn="ctr">
                       <a:solidFill>
-                        <a:srgbClr val="D0F1DA"/>
+                        <a:srgbClr val="D4F7DE"/>
                       </a:solidFill>
                       <a:prstDash val="solid"/>
                     </a:lnL>
                     <a:lnR w="9525" cap="flat" cmpd="sng" algn="ctr">
                       <a:solidFill>
-                        <a:srgbClr val="D0F1DA"/>
+                        <a:srgbClr val="D4F7DE"/>
                       </a:solidFill>
                       <a:prstDash val="solid"/>
                     </a:lnR>
                     <a:lnT w="9525" cap="flat" cmpd="sng" algn="ctr">
                       <a:solidFill>
-                        <a:srgbClr val="D0F1DA"/>
+                        <a:srgbClr val="D4F7DE"/>
                       </a:solidFill>
                       <a:prstDash val="solid"/>
                     </a:lnT>
                     <a:lnB w="9525" cap="flat" cmpd="sng" algn="ctr">
                       <a:solidFill>
-                        <a:srgbClr val="D0F1DA"/>
+                        <a:srgbClr val="D4F7DE"/>
                       </a:solidFill>
                       <a:prstDash val="solid"/>
                     </a:lnB>
@@ -3998,7 +3998,7 @@
                       <a:r>
                         <a:rPr sz="1500" b="1">
                           <a:solidFill>
-                            <a:srgbClr val="143D21"/>
+                            <a:srgbClr val="1D7236"/>
                           </a:solidFill>
                         </a:rPr>
                         <a:t>별명</a:t>
@@ -4008,30 +4008,30 @@
                   <a:tcPr anchor="ctr" marL="73152" marR="73152">
                     <a:lnL w="9525" cap="flat" cmpd="sng" algn="ctr">
                       <a:solidFill>
-                        <a:srgbClr val="D0F1DA"/>
+                        <a:srgbClr val="D4F7DE"/>
                       </a:solidFill>
                       <a:prstDash val="solid"/>
                     </a:lnL>
                     <a:lnR w="9525" cap="flat" cmpd="sng" algn="ctr">
                       <a:solidFill>
-                        <a:srgbClr val="D0F1DA"/>
+                        <a:srgbClr val="D4F7DE"/>
                       </a:solidFill>
                       <a:prstDash val="solid"/>
                     </a:lnR>
                     <a:lnT w="9525" cap="flat" cmpd="sng" algn="ctr">
                       <a:solidFill>
-                        <a:srgbClr val="D0F1DA"/>
+                        <a:srgbClr val="D4F7DE"/>
                       </a:solidFill>
                       <a:prstDash val="solid"/>
                     </a:lnT>
                     <a:lnB w="9525" cap="flat" cmpd="sng" algn="ctr">
                       <a:solidFill>
-                        <a:srgbClr val="D0F1DA"/>
+                        <a:srgbClr val="D4F7DE"/>
                       </a:solidFill>
                       <a:prstDash val="solid"/>
                     </a:lnB>
                     <a:solidFill>
-                      <a:srgbClr val="D0F1DA"/>
+                      <a:srgbClr val="D4F7DE"/>
                     </a:solidFill>
                   </a:tcPr>
                 </a:tc>
@@ -4054,30 +4054,30 @@
                   <a:tcPr anchor="ctr" marL="73152" marR="73152">
                     <a:lnL w="9525" cap="flat" cmpd="sng" algn="ctr">
                       <a:solidFill>
-                        <a:srgbClr val="D0F1DA"/>
+                        <a:srgbClr val="D4F7DE"/>
                       </a:solidFill>
                       <a:prstDash val="solid"/>
                     </a:lnL>
                     <a:lnR w="9525" cap="flat" cmpd="sng" algn="ctr">
                       <a:solidFill>
-                        <a:srgbClr val="D0F1DA"/>
+                        <a:srgbClr val="D4F7DE"/>
                       </a:solidFill>
                       <a:prstDash val="solid"/>
                     </a:lnR>
                     <a:lnT w="9525" cap="flat" cmpd="sng" algn="ctr">
                       <a:solidFill>
-                        <a:srgbClr val="D0F1DA"/>
+                        <a:srgbClr val="D4F7DE"/>
                       </a:solidFill>
                       <a:prstDash val="solid"/>
                     </a:lnT>
                     <a:lnB w="9525" cap="flat" cmpd="sng" algn="ctr">
                       <a:solidFill>
-                        <a:srgbClr val="D0F1DA"/>
+                        <a:srgbClr val="D4F7DE"/>
                       </a:solidFill>
                       <a:prstDash val="solid"/>
                     </a:lnB>
                     <a:solidFill>
-                      <a:srgbClr val="F0FAF3"/>
+                      <a:srgbClr val="F3FCF6"/>
                     </a:solidFill>
                   </a:tcPr>
                 </a:tc>
@@ -4092,7 +4092,7 @@
                       <a:r>
                         <a:rPr sz="1500" b="1">
                           <a:solidFill>
-                            <a:srgbClr val="143D21"/>
+                            <a:srgbClr val="1D7236"/>
                           </a:solidFill>
                         </a:rPr>
                         <a:t>부모의 마음</a:t>
@@ -4102,30 +4102,30 @@
                   <a:tcPr anchor="ctr" marL="73152" marR="73152">
                     <a:lnL w="9525" cap="flat" cmpd="sng" algn="ctr">
                       <a:solidFill>
-                        <a:srgbClr val="D0F1DA"/>
+                        <a:srgbClr val="D4F7DE"/>
                       </a:solidFill>
                       <a:prstDash val="solid"/>
                     </a:lnL>
                     <a:lnR w="9525" cap="flat" cmpd="sng" algn="ctr">
                       <a:solidFill>
-                        <a:srgbClr val="D0F1DA"/>
+                        <a:srgbClr val="D4F7DE"/>
                       </a:solidFill>
                       <a:prstDash val="solid"/>
                     </a:lnR>
                     <a:lnT w="9525" cap="flat" cmpd="sng" algn="ctr">
                       <a:solidFill>
-                        <a:srgbClr val="D0F1DA"/>
+                        <a:srgbClr val="D4F7DE"/>
                       </a:solidFill>
                       <a:prstDash val="solid"/>
                     </a:lnT>
                     <a:lnB w="9525" cap="flat" cmpd="sng" algn="ctr">
                       <a:solidFill>
-                        <a:srgbClr val="D0F1DA"/>
+                        <a:srgbClr val="D4F7DE"/>
                       </a:solidFill>
                       <a:prstDash val="solid"/>
                     </a:lnB>
                     <a:solidFill>
-                      <a:srgbClr val="D0F1DA"/>
+                      <a:srgbClr val="D4F7DE"/>
                     </a:solidFill>
                   </a:tcPr>
                 </a:tc>
@@ -4148,25 +4148,25 @@
                   <a:tcPr anchor="ctr" marL="73152" marR="73152">
                     <a:lnL w="9525" cap="flat" cmpd="sng" algn="ctr">
                       <a:solidFill>
-                        <a:srgbClr val="D0F1DA"/>
+                        <a:srgbClr val="D4F7DE"/>
                       </a:solidFill>
                       <a:prstDash val="solid"/>
                     </a:lnL>
                     <a:lnR w="9525" cap="flat" cmpd="sng" algn="ctr">
                       <a:solidFill>
-                        <a:srgbClr val="D0F1DA"/>
+                        <a:srgbClr val="D4F7DE"/>
                       </a:solidFill>
                       <a:prstDash val="solid"/>
                     </a:lnR>
                     <a:lnT w="9525" cap="flat" cmpd="sng" algn="ctr">
                       <a:solidFill>
-                        <a:srgbClr val="D0F1DA"/>
+                        <a:srgbClr val="D4F7DE"/>
                       </a:solidFill>
                       <a:prstDash val="solid"/>
                     </a:lnT>
                     <a:lnB w="9525" cap="flat" cmpd="sng" algn="ctr">
                       <a:solidFill>
-                        <a:srgbClr val="D0F1DA"/>
+                        <a:srgbClr val="D4F7DE"/>
                       </a:solidFill>
                       <a:prstDash val="solid"/>
                     </a:lnB>
@@ -4194,7 +4194,7 @@
     <p:bg>
       <p:bgPr>
         <a:solidFill>
-          <a:srgbClr val="D0F1DA"/>
+          <a:srgbClr val="D4F7DE"/>
         </a:solidFill>
         <a:effectLst/>
       </p:bgPr>
@@ -4225,7 +4225,7 @@
           </a:solidFill>
           <a:ln w="25400">
             <a:solidFill>
-              <a:srgbClr val="2B8245"/>
+              <a:srgbClr val="43D66F"/>
             </a:solidFill>
             <a:prstDash val="dash"/>
           </a:ln>
@@ -4268,7 +4268,7 @@
             <a:r>
               <a:rPr sz="3000" b="1" i="0">
                 <a:solidFill>
-                  <a:srgbClr val="143D21"/>
+                  <a:srgbClr val="1D7236"/>
                 </a:solidFill>
               </a:rPr>
               <a:t>첫 번째 생일 사진</a:t>
@@ -4293,11 +4293,11 @@
             </a:avLst>
           </a:prstGeom>
           <a:solidFill>
-            <a:srgbClr val="D0F1DA"/>
+            <a:srgbClr val="D4F7DE"/>
           </a:solidFill>
           <a:ln w="19050">
             <a:solidFill>
-              <a:srgbClr val="2B8245"/>
+              <a:srgbClr val="43D66F"/>
             </a:solidFill>
             <a:prstDash val="dash"/>
           </a:ln>
@@ -4316,7 +4316,7 @@
             <a:r>
               <a:rPr sz="1400" b="0" i="0">
                 <a:solidFill>
-                  <a:srgbClr val="143D21"/>
+                  <a:srgbClr val="1D7236"/>
                 </a:solidFill>
               </a:rPr>
               <a:t>대표 사진 1</a:t>
@@ -4341,11 +4341,11 @@
             </a:avLst>
           </a:prstGeom>
           <a:solidFill>
-            <a:srgbClr val="D0F1DA"/>
+            <a:srgbClr val="D4F7DE"/>
           </a:solidFill>
           <a:ln w="19050">
             <a:solidFill>
-              <a:srgbClr val="2B8245"/>
+              <a:srgbClr val="43D66F"/>
             </a:solidFill>
             <a:prstDash val="dash"/>
           </a:ln>
@@ -4364,7 +4364,7 @@
             <a:r>
               <a:rPr sz="1400" b="0" i="0">
                 <a:solidFill>
-                  <a:srgbClr val="143D21"/>
+                  <a:srgbClr val="1D7236"/>
                 </a:solidFill>
               </a:rPr>
               <a:t>대표 사진 2</a:t>
@@ -4386,7 +4386,7 @@
     <p:bg>
       <p:bgPr>
         <a:solidFill>
-          <a:srgbClr val="D0F1DA"/>
+          <a:srgbClr val="D4F7DE"/>
         </a:solidFill>
         <a:effectLst/>
       </p:bgPr>
@@ -4417,7 +4417,7 @@
           </a:solidFill>
           <a:ln w="25400">
             <a:solidFill>
-              <a:srgbClr val="2B8245"/>
+              <a:srgbClr val="43D66F"/>
             </a:solidFill>
             <a:prstDash val="dash"/>
           </a:ln>
@@ -4460,7 +4460,7 @@
             <a:r>
               <a:rPr sz="3000" b="1" i="0">
                 <a:solidFill>
-                  <a:srgbClr val="143D21"/>
+                  <a:srgbClr val="1D7236"/>
                 </a:solidFill>
               </a:rPr>
               <a:t>한 해의 순간들</a:t>
@@ -4485,11 +4485,11 @@
             </a:avLst>
           </a:prstGeom>
           <a:solidFill>
-            <a:srgbClr val="D0F1DA"/>
+            <a:srgbClr val="D4F7DE"/>
           </a:solidFill>
           <a:ln w="19050">
             <a:solidFill>
-              <a:srgbClr val="2B8245"/>
+              <a:srgbClr val="43D66F"/>
             </a:solidFill>
             <a:prstDash val="dash"/>
           </a:ln>
@@ -4508,7 +4508,7 @@
             <a:r>
               <a:rPr sz="1200" b="0" i="0">
                 <a:solidFill>
-                  <a:srgbClr val="143D21"/>
+                  <a:srgbClr val="1D7236"/>
                 </a:solidFill>
               </a:rPr>
               <a:t>사진 1</a:t>
@@ -4533,11 +4533,11 @@
             </a:avLst>
           </a:prstGeom>
           <a:solidFill>
-            <a:srgbClr val="D0F1DA"/>
+            <a:srgbClr val="D4F7DE"/>
           </a:solidFill>
           <a:ln w="19050">
             <a:solidFill>
-              <a:srgbClr val="2B8245"/>
+              <a:srgbClr val="43D66F"/>
             </a:solidFill>
             <a:prstDash val="dash"/>
           </a:ln>
@@ -4556,7 +4556,7 @@
             <a:r>
               <a:rPr sz="1200" b="0" i="0">
                 <a:solidFill>
-                  <a:srgbClr val="143D21"/>
+                  <a:srgbClr val="1D7236"/>
                 </a:solidFill>
               </a:rPr>
               <a:t>사진 2</a:t>
@@ -4581,11 +4581,11 @@
             </a:avLst>
           </a:prstGeom>
           <a:solidFill>
-            <a:srgbClr val="D0F1DA"/>
+            <a:srgbClr val="D4F7DE"/>
           </a:solidFill>
           <a:ln w="19050">
             <a:solidFill>
-              <a:srgbClr val="2B8245"/>
+              <a:srgbClr val="43D66F"/>
             </a:solidFill>
             <a:prstDash val="dash"/>
           </a:ln>
@@ -4604,7 +4604,7 @@
             <a:r>
               <a:rPr sz="1200" b="0" i="0">
                 <a:solidFill>
-                  <a:srgbClr val="143D21"/>
+                  <a:srgbClr val="1D7236"/>
                 </a:solidFill>
               </a:rPr>
               <a:t>사진 3</a:t>
@@ -4629,11 +4629,11 @@
             </a:avLst>
           </a:prstGeom>
           <a:solidFill>
-            <a:srgbClr val="D0F1DA"/>
+            <a:srgbClr val="D4F7DE"/>
           </a:solidFill>
           <a:ln w="19050">
             <a:solidFill>
-              <a:srgbClr val="2B8245"/>
+              <a:srgbClr val="43D66F"/>
             </a:solidFill>
             <a:prstDash val="dash"/>
           </a:ln>
@@ -4652,7 +4652,7 @@
             <a:r>
               <a:rPr sz="1200" b="0" i="0">
                 <a:solidFill>
-                  <a:srgbClr val="143D21"/>
+                  <a:srgbClr val="1D7236"/>
                 </a:solidFill>
               </a:rPr>
               <a:t>사진 4</a:t>
@@ -4677,11 +4677,11 @@
             </a:avLst>
           </a:prstGeom>
           <a:solidFill>
-            <a:srgbClr val="D0F1DA"/>
+            <a:srgbClr val="D4F7DE"/>
           </a:solidFill>
           <a:ln w="19050">
             <a:solidFill>
-              <a:srgbClr val="2B8245"/>
+              <a:srgbClr val="43D66F"/>
             </a:solidFill>
             <a:prstDash val="dash"/>
           </a:ln>
@@ -4700,7 +4700,7 @@
             <a:r>
               <a:rPr sz="1200" b="0" i="0">
                 <a:solidFill>
-                  <a:srgbClr val="143D21"/>
+                  <a:srgbClr val="1D7236"/>
                 </a:solidFill>
               </a:rPr>
               <a:t>사진 5</a:t>
@@ -4725,11 +4725,11 @@
             </a:avLst>
           </a:prstGeom>
           <a:solidFill>
-            <a:srgbClr val="D0F1DA"/>
+            <a:srgbClr val="D4F7DE"/>
           </a:solidFill>
           <a:ln w="19050">
             <a:solidFill>
-              <a:srgbClr val="2B8245"/>
+              <a:srgbClr val="43D66F"/>
             </a:solidFill>
             <a:prstDash val="dash"/>
           </a:ln>
@@ -4748,7 +4748,7 @@
             <a:r>
               <a:rPr sz="1200" b="0" i="0">
                 <a:solidFill>
-                  <a:srgbClr val="143D21"/>
+                  <a:srgbClr val="1D7236"/>
                 </a:solidFill>
               </a:rPr>
               <a:t>사진 6</a:t>
@@ -4770,7 +4770,7 @@
     <p:bg>
       <p:bgPr>
         <a:solidFill>
-          <a:srgbClr val="D0F1DA"/>
+          <a:srgbClr val="D4F7DE"/>
         </a:solidFill>
         <a:effectLst/>
       </p:bgPr>
@@ -4801,7 +4801,7 @@
           </a:solidFill>
           <a:ln w="25400">
             <a:solidFill>
-              <a:srgbClr val="2B8245"/>
+              <a:srgbClr val="43D66F"/>
             </a:solidFill>
             <a:prstDash val="dash"/>
           </a:ln>
@@ -4844,7 +4844,7 @@
             <a:r>
               <a:rPr sz="3000" b="1" i="0">
                 <a:solidFill>
-                  <a:srgbClr val="143D21"/>
+                  <a:srgbClr val="1D7236"/>
                 </a:solidFill>
               </a:rPr>
               <a:t>사진 모음</a:t>
@@ -4869,11 +4869,11 @@
             </a:avLst>
           </a:prstGeom>
           <a:solidFill>
-            <a:srgbClr val="D0F1DA"/>
+            <a:srgbClr val="D4F7DE"/>
           </a:solidFill>
           <a:ln w="19050">
             <a:solidFill>
-              <a:srgbClr val="2B8245"/>
+              <a:srgbClr val="43D66F"/>
             </a:solidFill>
             <a:prstDash val="dash"/>
           </a:ln>
@@ -4892,7 +4892,7 @@
             <a:r>
               <a:rPr sz="1200" b="0" i="0">
                 <a:solidFill>
-                  <a:srgbClr val="143D21"/>
+                  <a:srgbClr val="1D7236"/>
                 </a:solidFill>
               </a:rPr>
               <a:t>사진 1</a:t>
@@ -4917,11 +4917,11 @@
             </a:avLst>
           </a:prstGeom>
           <a:solidFill>
-            <a:srgbClr val="D0F1DA"/>
+            <a:srgbClr val="D4F7DE"/>
           </a:solidFill>
           <a:ln w="19050">
             <a:solidFill>
-              <a:srgbClr val="2B8245"/>
+              <a:srgbClr val="43D66F"/>
             </a:solidFill>
             <a:prstDash val="dash"/>
           </a:ln>
@@ -4940,7 +4940,7 @@
             <a:r>
               <a:rPr sz="1200" b="0" i="0">
                 <a:solidFill>
-                  <a:srgbClr val="143D21"/>
+                  <a:srgbClr val="1D7236"/>
                 </a:solidFill>
               </a:rPr>
               <a:t>사진 2</a:t>
@@ -4965,11 +4965,11 @@
             </a:avLst>
           </a:prstGeom>
           <a:solidFill>
-            <a:srgbClr val="D0F1DA"/>
+            <a:srgbClr val="D4F7DE"/>
           </a:solidFill>
           <a:ln w="19050">
             <a:solidFill>
-              <a:srgbClr val="2B8245"/>
+              <a:srgbClr val="43D66F"/>
             </a:solidFill>
             <a:prstDash val="dash"/>
           </a:ln>
@@ -4988,7 +4988,7 @@
             <a:r>
               <a:rPr sz="1200" b="0" i="0">
                 <a:solidFill>
-                  <a:srgbClr val="143D21"/>
+                  <a:srgbClr val="1D7236"/>
                 </a:solidFill>
               </a:rPr>
               <a:t>사진 3</a:t>
@@ -5013,11 +5013,11 @@
             </a:avLst>
           </a:prstGeom>
           <a:solidFill>
-            <a:srgbClr val="D0F1DA"/>
+            <a:srgbClr val="D4F7DE"/>
           </a:solidFill>
           <a:ln w="19050">
             <a:solidFill>
-              <a:srgbClr val="2B8245"/>
+              <a:srgbClr val="43D66F"/>
             </a:solidFill>
             <a:prstDash val="dash"/>
           </a:ln>
@@ -5036,7 +5036,7 @@
             <a:r>
               <a:rPr sz="1200" b="0" i="0">
                 <a:solidFill>
-                  <a:srgbClr val="143D21"/>
+                  <a:srgbClr val="1D7236"/>
                 </a:solidFill>
               </a:rPr>
               <a:t>사진 4</a:t>
@@ -5061,11 +5061,11 @@
             </a:avLst>
           </a:prstGeom>
           <a:solidFill>
-            <a:srgbClr val="D0F1DA"/>
+            <a:srgbClr val="D4F7DE"/>
           </a:solidFill>
           <a:ln w="19050">
             <a:solidFill>
-              <a:srgbClr val="2B8245"/>
+              <a:srgbClr val="43D66F"/>
             </a:solidFill>
             <a:prstDash val="dash"/>
           </a:ln>
@@ -5084,7 +5084,7 @@
             <a:r>
               <a:rPr sz="1200" b="0" i="0">
                 <a:solidFill>
-                  <a:srgbClr val="143D21"/>
+                  <a:srgbClr val="1D7236"/>
                 </a:solidFill>
               </a:rPr>
               <a:t>사진 5</a:t>
@@ -5109,11 +5109,11 @@
             </a:avLst>
           </a:prstGeom>
           <a:solidFill>
-            <a:srgbClr val="D0F1DA"/>
+            <a:srgbClr val="D4F7DE"/>
           </a:solidFill>
           <a:ln w="19050">
             <a:solidFill>
-              <a:srgbClr val="2B8245"/>
+              <a:srgbClr val="43D66F"/>
             </a:solidFill>
             <a:prstDash val="dash"/>
           </a:ln>
@@ -5132,7 +5132,7 @@
             <a:r>
               <a:rPr sz="1200" b="0" i="0">
                 <a:solidFill>
-                  <a:srgbClr val="143D21"/>
+                  <a:srgbClr val="1D7236"/>
                 </a:solidFill>
               </a:rPr>
               <a:t>사진 6</a:t>
@@ -5157,11 +5157,11 @@
             </a:avLst>
           </a:prstGeom>
           <a:solidFill>
-            <a:srgbClr val="D0F1DA"/>
+            <a:srgbClr val="D4F7DE"/>
           </a:solidFill>
           <a:ln w="19050">
             <a:solidFill>
-              <a:srgbClr val="2B8245"/>
+              <a:srgbClr val="43D66F"/>
             </a:solidFill>
             <a:prstDash val="dash"/>
           </a:ln>
@@ -5180,7 +5180,7 @@
             <a:r>
               <a:rPr sz="1200" b="0" i="0">
                 <a:solidFill>
-                  <a:srgbClr val="143D21"/>
+                  <a:srgbClr val="1D7236"/>
                 </a:solidFill>
               </a:rPr>
               <a:t>사진 7</a:t>
@@ -5205,11 +5205,11 @@
             </a:avLst>
           </a:prstGeom>
           <a:solidFill>
-            <a:srgbClr val="D0F1DA"/>
+            <a:srgbClr val="D4F7DE"/>
           </a:solidFill>
           <a:ln w="19050">
             <a:solidFill>
-              <a:srgbClr val="2B8245"/>
+              <a:srgbClr val="43D66F"/>
             </a:solidFill>
             <a:prstDash val="dash"/>
           </a:ln>
@@ -5228,7 +5228,7 @@
             <a:r>
               <a:rPr sz="1200" b="0" i="0">
                 <a:solidFill>
-                  <a:srgbClr val="143D21"/>
+                  <a:srgbClr val="1D7236"/>
                 </a:solidFill>
               </a:rPr>
               <a:t>사진 8</a:t>
@@ -5308,7 +5308,7 @@
             <a:r>
               <a:rPr sz="3400" b="1" i="0">
                 <a:solidFill>
-                  <a:srgbClr val="143D21"/>
+                  <a:srgbClr val="1D7236"/>
                 </a:solidFill>
               </a:rPr>
               <a:t>와 주셔서 고맙습니다</a:t>
@@ -5346,7 +5346,7 @@
             <a:r>
               <a:rPr sz="1700" b="0" i="1">
                 <a:solidFill>
-                  <a:srgbClr val="143D21"/>
+                  <a:srgbClr val="1D7236"/>
                 </a:solidFill>
               </a:rPr>
               <a:t>아이가 한 살이 되었습니다</a:t>
@@ -5411,34 +5411,34 @@
         <a:sysClr val="window" lastClr="FFFFFF"/>
       </a:lt1>
       <a:dk2>
-        <a:srgbClr val="143D21"/>
+        <a:srgbClr val="1D7236"/>
       </a:dk2>
       <a:lt2>
-        <a:srgbClr val="F0FAF3"/>
+        <a:srgbClr val="F3FCF6"/>
       </a:lt2>
       <a:accent1>
-        <a:srgbClr val="2B8245"/>
+        <a:srgbClr val="43D66F"/>
       </a:accent1>
       <a:accent2>
-        <a:srgbClr val="803B91"/>
+        <a:srgbClr val="339941"/>
       </a:accent2>
       <a:accent3>
-        <a:srgbClr val="143D21"/>
+        <a:srgbClr val="1D7236"/>
       </a:accent3>
       <a:accent4>
-        <a:srgbClr val="D0F1DA"/>
+        <a:srgbClr val="D4F7DE"/>
       </a:accent4>
       <a:accent5>
-        <a:srgbClr val="565E6B"/>
+        <a:srgbClr val="3BB858"/>
       </a:accent5>
       <a:accent6>
-        <a:srgbClr val="728B7A"/>
+        <a:srgbClr val="77AA86"/>
       </a:accent6>
       <a:hlink>
-        <a:srgbClr val="2B8245"/>
+        <a:srgbClr val="43D66F"/>
       </a:hlink>
       <a:folHlink>
-        <a:srgbClr val="143D21"/>
+        <a:srgbClr val="1D7236"/>
       </a:folHlink>
     </a:clrScheme>
     <a:fontScheme name="Office">
